--- a/arch-docs/summary/ehlnofey-tier-ladders.pptx
+++ b/arch-docs/summary/ehlnofey-tier-ladders.pptx
@@ -10,17 +10,17 @@
     <p:sldId id="258" r:id="rId9"/>
     <p:sldId id="259" r:id="rId10"/>
     <p:sldId id="260" r:id="rId11"/>
-    <p:sldId id="261" r:id="rId12"/>
-    <p:sldId id="262" r:id="rId13"/>
-    <p:sldId id="263" r:id="rId14"/>
-    <p:sldId id="264" r:id="rId15"/>
-    <p:sldId id="265" r:id="rId16"/>
-    <p:sldId id="266" r:id="rId17"/>
-    <p:sldId id="267" r:id="rId18"/>
-    <p:sldId id="268" r:id="rId19"/>
-    <p:sldId id="269" r:id="rId20"/>
-    <p:sldId id="270" r:id="rId21"/>
-    <p:sldId id="271" r:id="rId22"/>
+    <p:sldId id="261" r:id="rId13"/>
+    <p:sldId id="262" r:id="rId14"/>
+    <p:sldId id="263" r:id="rId15"/>
+    <p:sldId id="264" r:id="rId16"/>
+    <p:sldId id="265" r:id="rId17"/>
+    <p:sldId id="266" r:id="rId18"/>
+    <p:sldId id="267" r:id="rId19"/>
+    <p:sldId id="268" r:id="rId20"/>
+    <p:sldId id="269" r:id="rId21"/>
+    <p:sldId id="270" r:id="rId22"/>
+    <p:sldId id="271" r:id="rId23"/>
   </p:sldIdLst>
   <p:sldSz cx="12191695" cy="6858000" type="screen4x3"/>
   <p:notesSz cx="6858000" cy="9144000"/>
@@ -120,6 +120,444 @@
     </a:lvl9pPr>
   </p:defaultTextStyle>
 </p:presentation>
+</file>
+
+<file path=ppt/notesMasters/notesMaster1.xml><?xml version="1.0" encoding="utf-8"?>
+<p:notesMaster xmlns:a="http://schemas.openxmlformats.org/drawingml/2006/main" xmlns:p="http://schemas.openxmlformats.org/presentationml/2006/main" xmlns:r="http://schemas.openxmlformats.org/officeDocument/2006/relationships">
+  <p:cSld>
+    <p:bg>
+      <p:bgRef idx="1001">
+        <a:schemeClr val="bg1"/>
+      </p:bgRef>
+    </p:bg>
+    <p:spTree>
+      <p:nvGrpSpPr>
+        <p:cNvPr id="1" name=""/>
+        <p:cNvGrpSpPr/>
+        <p:nvPr/>
+      </p:nvGrpSpPr>
+      <p:grpSpPr>
+        <a:xfrm>
+          <a:off x="0" y="0"/>
+          <a:ext cx="0" cy="0"/>
+          <a:chOff x="0" y="0"/>
+          <a:chExt cx="0" cy="0"/>
+        </a:xfrm>
+      </p:grpSpPr>
+      <p:sp>
+        <p:nvSpPr>
+          <p:cNvPr id="2" name="Header Placeholder 1"/>
+          <p:cNvSpPr>
+            <a:spLocks noGrp="1"/>
+          </p:cNvSpPr>
+          <p:nvPr>
+            <p:ph type="hdr" sz="quarter"/>
+          </p:nvPr>
+        </p:nvSpPr>
+        <p:spPr>
+          <a:xfrm>
+            <a:off x="0" y="0"/>
+            <a:ext cx="2971800" cy="457200"/>
+          </a:xfrm>
+          <a:prstGeom prst="rect">
+            <a:avLst/>
+          </a:prstGeom>
+        </p:spPr>
+        <p:txBody>
+          <a:bodyPr vert="horz" lIns="91440" tIns="45720" rIns="91440" bIns="45720" rtlCol="0"/>
+          <a:lstStyle>
+            <a:lvl1pPr algn="l">
+              <a:defRPr sz="1200"/>
+            </a:lvl1pPr>
+          </a:lstStyle>
+          <a:p>
+            <a:endParaRPr lang="en-US"/>
+          </a:p>
+        </p:txBody>
+      </p:sp>
+      <p:sp>
+        <p:nvSpPr>
+          <p:cNvPr id="3" name="Date Placeholder 2"/>
+          <p:cNvSpPr>
+            <a:spLocks noGrp="1"/>
+          </p:cNvSpPr>
+          <p:nvPr>
+            <p:ph type="dt" idx="1"/>
+          </p:nvPr>
+        </p:nvSpPr>
+        <p:spPr>
+          <a:xfrm>
+            <a:off x="3884613" y="0"/>
+            <a:ext cx="2971800" cy="457200"/>
+          </a:xfrm>
+          <a:prstGeom prst="rect">
+            <a:avLst/>
+          </a:prstGeom>
+        </p:spPr>
+        <p:txBody>
+          <a:bodyPr vert="horz" lIns="91440" tIns="45720" rIns="91440" bIns="45720" rtlCol="0"/>
+          <a:lstStyle>
+            <a:lvl1pPr algn="r">
+              <a:defRPr sz="1200"/>
+            </a:lvl1pPr>
+          </a:lstStyle>
+          <a:p>
+            <a:fld id="{0F89C1C7-3DCD-1040-A9CF-14679D8B5DDD}" type="datetimeFigureOut">
+              <a:rPr lang="en-US" smtClean="0"/>
+              <a:t>10/17/16</a:t>
+            </a:fld>
+            <a:endParaRPr lang="en-US"/>
+          </a:p>
+        </p:txBody>
+      </p:sp>
+      <p:sp>
+        <p:nvSpPr>
+          <p:cNvPr id="4" name="Slide Image Placeholder 3"/>
+          <p:cNvSpPr>
+            <a:spLocks noGrp="1" noRot="1" noChangeAspect="1"/>
+          </p:cNvSpPr>
+          <p:nvPr>
+            <p:ph type="sldImg" idx="2"/>
+          </p:nvPr>
+        </p:nvSpPr>
+        <p:spPr>
+          <a:xfrm>
+            <a:off x="1143000" y="685800"/>
+            <a:ext cx="4572000" cy="3429000"/>
+          </a:xfrm>
+          <a:prstGeom prst="rect">
+            <a:avLst/>
+          </a:prstGeom>
+          <a:noFill/>
+          <a:ln w="12700">
+            <a:solidFill>
+              <a:prstClr val="black"/>
+            </a:solidFill>
+          </a:ln>
+        </p:spPr>
+        <p:txBody>
+          <a:bodyPr vert="horz" lIns="91440" tIns="45720" rIns="91440" bIns="45720" rtlCol="0" anchor="ctr"/>
+          <a:lstStyle/>
+          <a:p>
+            <a:endParaRPr lang="en-US"/>
+          </a:p>
+        </p:txBody>
+      </p:sp>
+      <p:sp>
+        <p:nvSpPr>
+          <p:cNvPr id="5" name="Notes Placeholder 4"/>
+          <p:cNvSpPr>
+            <a:spLocks noGrp="1"/>
+          </p:cNvSpPr>
+          <p:nvPr>
+            <p:ph type="body" sz="quarter" idx="3"/>
+          </p:nvPr>
+        </p:nvSpPr>
+        <p:spPr>
+          <a:xfrm>
+            <a:off x="685800" y="4343400"/>
+            <a:ext cx="5486400" cy="4114800"/>
+          </a:xfrm>
+          <a:prstGeom prst="rect">
+            <a:avLst/>
+          </a:prstGeom>
+        </p:spPr>
+        <p:txBody>
+          <a:bodyPr vert="horz" lIns="91440" tIns="45720" rIns="91440" bIns="45720" rtlCol="0"/>
+          <a:lstStyle/>
+          <a:p>
+            <a:pPr lvl="0"/>
+            <a:r>
+              <a:rPr lang="en-US" smtClean="0"/>
+              <a:t>Click to edit Master text styles</a:t>
+            </a:r>
+          </a:p>
+          <a:p>
+            <a:pPr lvl="1"/>
+            <a:r>
+              <a:rPr lang="en-US" smtClean="0"/>
+              <a:t>Second level</a:t>
+            </a:r>
+          </a:p>
+          <a:p>
+            <a:pPr lvl="2"/>
+            <a:r>
+              <a:rPr lang="en-US" smtClean="0"/>
+              <a:t>Third level</a:t>
+            </a:r>
+          </a:p>
+          <a:p>
+            <a:pPr lvl="3"/>
+            <a:r>
+              <a:rPr lang="en-US" smtClean="0"/>
+              <a:t>Fourth level</a:t>
+            </a:r>
+          </a:p>
+          <a:p>
+            <a:pPr lvl="4"/>
+            <a:r>
+              <a:rPr lang="en-US" smtClean="0"/>
+              <a:t>Fifth level</a:t>
+            </a:r>
+            <a:endParaRPr lang="en-US"/>
+          </a:p>
+        </p:txBody>
+      </p:sp>
+      <p:sp>
+        <p:nvSpPr>
+          <p:cNvPr id="6" name="Footer Placeholder 5"/>
+          <p:cNvSpPr>
+            <a:spLocks noGrp="1"/>
+          </p:cNvSpPr>
+          <p:nvPr>
+            <p:ph type="ftr" sz="quarter" idx="4"/>
+          </p:nvPr>
+        </p:nvSpPr>
+        <p:spPr>
+          <a:xfrm>
+            <a:off x="0" y="8685213"/>
+            <a:ext cx="2971800" cy="457200"/>
+          </a:xfrm>
+          <a:prstGeom prst="rect">
+            <a:avLst/>
+          </a:prstGeom>
+        </p:spPr>
+        <p:txBody>
+          <a:bodyPr vert="horz" lIns="91440" tIns="45720" rIns="91440" bIns="45720" rtlCol="0" anchor="b"/>
+          <a:lstStyle>
+            <a:lvl1pPr algn="l">
+              <a:defRPr sz="1200"/>
+            </a:lvl1pPr>
+          </a:lstStyle>
+          <a:p>
+            <a:endParaRPr lang="en-US"/>
+          </a:p>
+        </p:txBody>
+      </p:sp>
+      <p:sp>
+        <p:nvSpPr>
+          <p:cNvPr id="7" name="Slide Number Placeholder 6"/>
+          <p:cNvSpPr>
+            <a:spLocks noGrp="1"/>
+          </p:cNvSpPr>
+          <p:nvPr>
+            <p:ph type="sldNum" sz="quarter" idx="5"/>
+          </p:nvPr>
+        </p:nvSpPr>
+        <p:spPr>
+          <a:xfrm>
+            <a:off x="3884613" y="8685213"/>
+            <a:ext cx="2971800" cy="457200"/>
+          </a:xfrm>
+          <a:prstGeom prst="rect">
+            <a:avLst/>
+          </a:prstGeom>
+        </p:spPr>
+        <p:txBody>
+          <a:bodyPr vert="horz" lIns="91440" tIns="45720" rIns="91440" bIns="45720" rtlCol="0" anchor="b"/>
+          <a:lstStyle>
+            <a:lvl1pPr algn="r">
+              <a:defRPr sz="1200"/>
+            </a:lvl1pPr>
+          </a:lstStyle>
+          <a:p>
+            <a:fld id="{BB5E49A5-4136-284D-997B-48E1D791AD67}" type="slidenum">
+              <a:rPr lang="en-US" smtClean="0"/>
+              <a:t>‹#›</a:t>
+            </a:fld>
+            <a:endParaRPr lang="en-US"/>
+          </a:p>
+        </p:txBody>
+      </p:sp>
+    </p:spTree>
+    <p:extLst>
+      <p:ext uri="{BB962C8B-B14F-4D97-AF65-F5344CB8AC3E}">
+        <p14:creationId xmlns:p14="http://schemas.microsoft.com/office/powerpoint/2010/main" val="2623252185"/>
+      </p:ext>
+    </p:extLst>
+  </p:cSld>
+  <p:clrMap bg1="lt1" tx1="dk1" bg2="lt2" tx2="dk2" accent1="accent1" accent2="accent2" accent3="accent3" accent4="accent4" accent5="accent5" accent6="accent6" hlink="hlink" folHlink="folHlink"/>
+  <p:notesStyle>
+    <a:lvl1pPr marL="0" algn="l" defTabSz="457200" rtl="0" eaLnBrk="1" latinLnBrk="0" hangingPunct="1">
+      <a:defRPr sz="1200" kern="1200">
+        <a:solidFill>
+          <a:schemeClr val="tx1"/>
+        </a:solidFill>
+        <a:latin typeface="+mn-lt"/>
+        <a:ea typeface="+mn-ea"/>
+        <a:cs typeface="+mn-cs"/>
+      </a:defRPr>
+    </a:lvl1pPr>
+    <a:lvl2pPr marL="457200" algn="l" defTabSz="457200" rtl="0" eaLnBrk="1" latinLnBrk="0" hangingPunct="1">
+      <a:defRPr sz="1200" kern="1200">
+        <a:solidFill>
+          <a:schemeClr val="tx1"/>
+        </a:solidFill>
+        <a:latin typeface="+mn-lt"/>
+        <a:ea typeface="+mn-ea"/>
+        <a:cs typeface="+mn-cs"/>
+      </a:defRPr>
+    </a:lvl2pPr>
+    <a:lvl3pPr marL="914400" algn="l" defTabSz="457200" rtl="0" eaLnBrk="1" latinLnBrk="0" hangingPunct="1">
+      <a:defRPr sz="1200" kern="1200">
+        <a:solidFill>
+          <a:schemeClr val="tx1"/>
+        </a:solidFill>
+        <a:latin typeface="+mn-lt"/>
+        <a:ea typeface="+mn-ea"/>
+        <a:cs typeface="+mn-cs"/>
+      </a:defRPr>
+    </a:lvl3pPr>
+    <a:lvl4pPr marL="1371600" algn="l" defTabSz="457200" rtl="0" eaLnBrk="1" latinLnBrk="0" hangingPunct="1">
+      <a:defRPr sz="1200" kern="1200">
+        <a:solidFill>
+          <a:schemeClr val="tx1"/>
+        </a:solidFill>
+        <a:latin typeface="+mn-lt"/>
+        <a:ea typeface="+mn-ea"/>
+        <a:cs typeface="+mn-cs"/>
+      </a:defRPr>
+    </a:lvl4pPr>
+    <a:lvl5pPr marL="1828800" algn="l" defTabSz="457200" rtl="0" eaLnBrk="1" latinLnBrk="0" hangingPunct="1">
+      <a:defRPr sz="1200" kern="1200">
+        <a:solidFill>
+          <a:schemeClr val="tx1"/>
+        </a:solidFill>
+        <a:latin typeface="+mn-lt"/>
+        <a:ea typeface="+mn-ea"/>
+        <a:cs typeface="+mn-cs"/>
+      </a:defRPr>
+    </a:lvl5pPr>
+    <a:lvl6pPr marL="2286000" algn="l" defTabSz="457200" rtl="0" eaLnBrk="1" latinLnBrk="0" hangingPunct="1">
+      <a:defRPr sz="1200" kern="1200">
+        <a:solidFill>
+          <a:schemeClr val="tx1"/>
+        </a:solidFill>
+        <a:latin typeface="+mn-lt"/>
+        <a:ea typeface="+mn-ea"/>
+        <a:cs typeface="+mn-cs"/>
+      </a:defRPr>
+    </a:lvl6pPr>
+    <a:lvl7pPr marL="2743200" algn="l" defTabSz="457200" rtl="0" eaLnBrk="1" latinLnBrk="0" hangingPunct="1">
+      <a:defRPr sz="1200" kern="1200">
+        <a:solidFill>
+          <a:schemeClr val="tx1"/>
+        </a:solidFill>
+        <a:latin typeface="+mn-lt"/>
+        <a:ea typeface="+mn-ea"/>
+        <a:cs typeface="+mn-cs"/>
+      </a:defRPr>
+    </a:lvl7pPr>
+    <a:lvl8pPr marL="3200400" algn="l" defTabSz="457200" rtl="0" eaLnBrk="1" latinLnBrk="0" hangingPunct="1">
+      <a:defRPr sz="1200" kern="1200">
+        <a:solidFill>
+          <a:schemeClr val="tx1"/>
+        </a:solidFill>
+        <a:latin typeface="+mn-lt"/>
+        <a:ea typeface="+mn-ea"/>
+        <a:cs typeface="+mn-cs"/>
+      </a:defRPr>
+    </a:lvl8pPr>
+    <a:lvl9pPr marL="3657600" algn="l" defTabSz="457200" rtl="0" eaLnBrk="1" latinLnBrk="0" hangingPunct="1">
+      <a:defRPr sz="1200" kern="1200">
+        <a:solidFill>
+          <a:schemeClr val="tx1"/>
+        </a:solidFill>
+        <a:latin typeface="+mn-lt"/>
+        <a:ea typeface="+mn-ea"/>
+        <a:cs typeface="+mn-cs"/>
+      </a:defRPr>
+    </a:lvl9pPr>
+  </p:notesStyle>
+</p:notesMaster>
+</file>
+
+<file path=ppt/notesSlides/notesSlide1.xml><?xml version="1.0" encoding="utf-8"?>
+<p:notes xmlns:a="http://schemas.openxmlformats.org/drawingml/2006/main" xmlns:p="http://schemas.openxmlformats.org/presentationml/2006/main" xmlns:r="http://schemas.openxmlformats.org/officeDocument/2006/relationships">
+  <p:cSld>
+    <p:spTree>
+      <p:nvGrpSpPr>
+        <p:cNvPr id="1" name=""/>
+        <p:cNvGrpSpPr/>
+        <p:nvPr/>
+      </p:nvGrpSpPr>
+      <p:grpSpPr>
+        <a:xfrm>
+          <a:off x="0" y="0"/>
+          <a:ext cx="0" cy="0"/>
+          <a:chOff x="0" y="0"/>
+          <a:chExt cx="0" cy="0"/>
+        </a:xfrm>
+      </p:grpSpPr>
+      <p:sp>
+        <p:nvSpPr>
+          <p:cNvPr id="2" name="Slide Image Placeholder 1"/>
+          <p:cNvSpPr>
+            <a:spLocks noGrp="1"/>
+          </p:cNvSpPr>
+          <p:nvPr>
+            <p:ph type="sldImg" idx="2"/>
+          </p:nvPr>
+        </p:nvSpPr>
+        <p:spPr/>
+      </p:sp>
+      <p:sp>
+        <p:nvSpPr>
+          <p:cNvPr id="3" name="Notes Placeholder 2"/>
+          <p:cNvSpPr>
+            <a:spLocks noGrp="1"/>
+          </p:cNvSpPr>
+          <p:nvPr>
+            <p:ph type="body" idx="3" sz="quarter"/>
+          </p:nvPr>
+        </p:nvSpPr>
+        <p:spPr/>
+        <p:txBody>
+          <a:bodyPr/>
+          <a:lstStyle/>
+          <a:p>
+            <a:r>
+              <a:t>The switch is the flag 'CalculateFromAllLevelsLessThanOrEqualPlayer'.</a:t>
+            </a:r>
+          </a:p>
+          <a:p/>
+          <a:p>
+            <a:r>
+              <a:t>205 of the 264 leveled actor lists in the plugin carry it; 59 do not. So the 'picks at random from everything under your level' description on this slide is the majority case, not the universal one — without the flag a level-45 player meets a Bandit Marauder every single time.</a:t>
+            </a:r>
+          </a:p>
+          <a:p/>
+          <a:p>
+            <a:r>
+              <a:t>Why it stops mattering: once every gate is 1, 'all rows at or below my level' and 'only the highest qualifying row' select the same set — the entire list. So the flag was never audited and never needed to be.</a:t>
+            </a:r>
+          </a:p>
+          <a:p/>
+          <a:p>
+            <a:r>
+              <a:t>The example on screen, LCharBanditMelee1H (039CFC), does carry the flag.</a:t>
+            </a:r>
+          </a:p>
+        </p:txBody>
+      </p:sp>
+      <p:sp>
+        <p:nvSpPr>
+          <p:cNvPr id="4" name="Slide Number Placeholder 3"/>
+          <p:cNvSpPr>
+            <a:spLocks noGrp="1"/>
+          </p:cNvSpPr>
+          <p:nvPr>
+            <p:ph type="sldNum" idx="5" sz="quarter"/>
+          </p:nvPr>
+        </p:nvSpPr>
+        <p:spPr/>
+      </p:sp>
+    </p:spTree>
+  </p:cSld>
+  <p:clrMapOvr>
+    <a:masterClrMapping/>
+  </p:clrMapOvr>
+</p:notes>
 </file>
 
 <file path=ppt/slideLayouts/slideLayout1.xml><?xml version="1.0" encoding="utf-8"?>
@@ -16793,7 +17231,7 @@
         <p:spPr>
           <a:xfrm>
             <a:off x="5394959" y="2212848"/>
-            <a:ext cx="6065215" cy="1078992"/>
+            <a:ext cx="6065215" cy="914400"/>
           </a:xfrm>
           <a:prstGeom prst="rect">
             <a:avLst/>
@@ -16837,7 +17275,7 @@
         <p:spPr>
           <a:xfrm>
             <a:off x="5394959" y="2212848"/>
-            <a:ext cx="38404" cy="1078992"/>
+            <a:ext cx="38404" cy="914400"/>
           </a:xfrm>
           <a:prstGeom prst="rect">
             <a:avLst/>
@@ -16920,7 +17358,7 @@
         <p:spPr>
           <a:xfrm>
             <a:off x="5614416" y="2761488"/>
-            <a:ext cx="5626303" cy="402335"/>
+            <a:ext cx="5626303" cy="237744"/>
           </a:xfrm>
           <a:prstGeom prst="rect">
             <a:avLst/>
@@ -16961,8 +17399,8 @@
         </p:nvSpPr>
         <p:spPr>
           <a:xfrm>
-            <a:off x="5394959" y="3364991"/>
-            <a:ext cx="6065215" cy="1078992"/>
+            <a:off x="5394959" y="3236976"/>
+            <a:ext cx="6065215" cy="1261872"/>
           </a:xfrm>
           <a:prstGeom prst="rect">
             <a:avLst/>
@@ -17005,8 +17443,8 @@
         </p:nvSpPr>
         <p:spPr>
           <a:xfrm>
-            <a:off x="5394959" y="3364991"/>
-            <a:ext cx="38404" cy="1078992"/>
+            <a:off x="5394959" y="3236976"/>
+            <a:ext cx="38404" cy="1261872"/>
           </a:xfrm>
           <a:prstGeom prst="rect">
             <a:avLst/>
@@ -17049,7 +17487,7 @@
         </p:nvSpPr>
         <p:spPr>
           <a:xfrm>
-            <a:off x="5614416" y="3557016"/>
+            <a:off x="5614416" y="3429000"/>
             <a:ext cx="5626303" cy="310896"/>
           </a:xfrm>
           <a:prstGeom prst="rect">
@@ -17088,8 +17526,8 @@
         </p:nvSpPr>
         <p:spPr>
           <a:xfrm>
-            <a:off x="5614416" y="3913632"/>
-            <a:ext cx="5626303" cy="402335"/>
+            <a:off x="5614416" y="3785616"/>
+            <a:ext cx="5626303" cy="585215"/>
           </a:xfrm>
           <a:prstGeom prst="rect">
             <a:avLst/>
@@ -17117,7 +17555,7 @@
                 </a:solidFill>
                 <a:latin typeface="Segoe UI"/>
               </a:rPr>
-              <a:t>It removes every row gated above your level, then picks one of the survivors at random.</a:t>
+              <a:t>It removes every row gated above your level. Then one switch on the list — "calculate from all levels ≤ player" — decides what happens next: pick at random from everything left, or take only the highest row still standing.</a:t>
             </a:r>
           </a:p>
         </p:txBody>
@@ -17130,8 +17568,8 @@
         </p:nvSpPr>
         <p:spPr>
           <a:xfrm>
-            <a:off x="5394959" y="4517136"/>
-            <a:ext cx="6065215" cy="1078992"/>
+            <a:off x="5394959" y="4608576"/>
+            <a:ext cx="6065215" cy="1024128"/>
           </a:xfrm>
           <a:prstGeom prst="rect">
             <a:avLst/>
@@ -17174,8 +17612,8 @@
         </p:nvSpPr>
         <p:spPr>
           <a:xfrm>
-            <a:off x="5394959" y="4517136"/>
-            <a:ext cx="38404" cy="1078992"/>
+            <a:off x="5394959" y="4608576"/>
+            <a:ext cx="38404" cy="1024128"/>
           </a:xfrm>
           <a:prstGeom prst="rect">
             <a:avLst/>
@@ -17218,7 +17656,7 @@
         </p:nvSpPr>
         <p:spPr>
           <a:xfrm>
-            <a:off x="5614416" y="4709159"/>
+            <a:off x="5614416" y="4800600"/>
             <a:ext cx="5626303" cy="310896"/>
           </a:xfrm>
           <a:prstGeom prst="rect">
@@ -17257,8 +17695,8 @@
         </p:nvSpPr>
         <p:spPr>
           <a:xfrm>
-            <a:off x="5614416" y="5065776"/>
-            <a:ext cx="5626303" cy="402335"/>
+            <a:off x="5614416" y="5157216"/>
+            <a:ext cx="5626303" cy="347472"/>
           </a:xfrm>
           <a:prstGeom prst="rect">
             <a:avLst/>
@@ -17286,7 +17724,7 @@
                 </a:solidFill>
                 <a:latin typeface="Segoe UI"/>
               </a:rPr>
-              <a:t>At level 3 one row is live, so you always meet a plain Bandit. At level 45 all six are live. Same spawn point, different world.</a:t>
+              <a:t>At level 3 one row is live, so you always meet a plain Bandit. At level 45 the list has opened up. Same spawn point, different world.</a:t>
             </a:r>
           </a:p>
         </p:txBody>
@@ -17299,7 +17737,7 @@
         </p:nvSpPr>
         <p:spPr>
           <a:xfrm>
-            <a:off x="731520" y="5742432"/>
+            <a:off x="731520" y="5760720"/>
             <a:ext cx="10728655" cy="502920"/>
           </a:xfrm>
           <a:prstGeom prst="rect">
@@ -17343,7 +17781,7 @@
         </p:nvSpPr>
         <p:spPr>
           <a:xfrm>
-            <a:off x="731520" y="5742432"/>
+            <a:off x="731520" y="5760720"/>
             <a:ext cx="38404" cy="502920"/>
           </a:xfrm>
           <a:prstGeom prst="rect">
@@ -17387,7 +17825,7 @@
         </p:nvSpPr>
         <p:spPr>
           <a:xfrm>
-            <a:off x="1005840" y="5760720"/>
+            <a:off x="1005840" y="5779007"/>
             <a:ext cx="10180015" cy="466344"/>
           </a:xfrm>
           <a:prstGeom prst="rect">
@@ -17416,7 +17854,7 @@
                 </a:solidFill>
                 <a:latin typeface="Segoe UI"/>
               </a:rPr>
-              <a:t>That one number — the gate — is the entire scaling mechanism. Remove it and the world stops following the player.</a:t>
+              <a:t>That one number is the entire scaling mechanism — and flattening it to 1 collapses both behaviours into one, because then the whole list is the highest row. Live, always, at every player level.</a:t>
             </a:r>
           </a:p>
         </p:txBody>
@@ -23232,4 +23670,324 @@
   </a:objectDefaults>
   <a:extraClrSchemeLst/>
 </a:theme>
+</file>
+
+<file path=ppt/theme/theme2.xml><?xml version="1.0" encoding="utf-8"?>
+<a:theme xmlns:a="http://schemas.openxmlformats.org/drawingml/2006/main" name="Office Theme">
+  <a:themeElements>
+    <a:clrScheme name="Office">
+      <a:dk1>
+        <a:sysClr val="windowText" lastClr="000000"/>
+      </a:dk1>
+      <a:lt1>
+        <a:sysClr val="window" lastClr="FFFFFF"/>
+      </a:lt1>
+      <a:dk2>
+        <a:srgbClr val="1F497D"/>
+      </a:dk2>
+      <a:lt2>
+        <a:srgbClr val="EEECE1"/>
+      </a:lt2>
+      <a:accent1>
+        <a:srgbClr val="4F81BD"/>
+      </a:accent1>
+      <a:accent2>
+        <a:srgbClr val="C0504D"/>
+      </a:accent2>
+      <a:accent3>
+        <a:srgbClr val="9BBB59"/>
+      </a:accent3>
+      <a:accent4>
+        <a:srgbClr val="8064A2"/>
+      </a:accent4>
+      <a:accent5>
+        <a:srgbClr val="4BACC6"/>
+      </a:accent5>
+      <a:accent6>
+        <a:srgbClr val="F79646"/>
+      </a:accent6>
+      <a:hlink>
+        <a:srgbClr val="0000FF"/>
+      </a:hlink>
+      <a:folHlink>
+        <a:srgbClr val="800080"/>
+      </a:folHlink>
+    </a:clrScheme>
+    <a:fontScheme name="Office">
+      <a:majorFont>
+        <a:latin typeface="Calibri"/>
+        <a:ea typeface=""/>
+        <a:cs typeface=""/>
+        <a:font script="Jpan" typeface="ＭＳ Ｐゴシック"/>
+        <a:font script="Hang" typeface="맑은 고딕"/>
+        <a:font script="Hans" typeface="宋体"/>
+        <a:font script="Hant" typeface="新細明體"/>
+        <a:font script="Arab" typeface="Times New Roman"/>
+        <a:font script="Hebr" typeface="Times New Roman"/>
+        <a:font script="Thai" typeface="Angsana New"/>
+        <a:font script="Ethi" typeface="Nyala"/>
+        <a:font script="Beng" typeface="Vrinda"/>
+        <a:font script="Gujr" typeface="Shruti"/>
+        <a:font script="Khmr" typeface="MoolBoran"/>
+        <a:font script="Knda" typeface="Tunga"/>
+        <a:font script="Guru" typeface="Raavi"/>
+        <a:font script="Cans" typeface="Euphemia"/>
+        <a:font script="Cher" typeface="Plantagenet Cherokee"/>
+        <a:font script="Yiii" typeface="Microsoft Yi Baiti"/>
+        <a:font script="Tibt" typeface="Microsoft Himalaya"/>
+        <a:font script="Thaa" typeface="MV Boli"/>
+        <a:font script="Deva" typeface="Mangal"/>
+        <a:font script="Telu" typeface="Gautami"/>
+        <a:font script="Taml" typeface="Latha"/>
+        <a:font script="Syrc" typeface="Estrangelo Edessa"/>
+        <a:font script="Orya" typeface="Kalinga"/>
+        <a:font script="Mlym" typeface="Kartika"/>
+        <a:font script="Laoo" typeface="DokChampa"/>
+        <a:font script="Sinh" typeface="Iskoola Pota"/>
+        <a:font script="Mong" typeface="Mongolian Baiti"/>
+        <a:font script="Viet" typeface="Times New Roman"/>
+        <a:font script="Uigh" typeface="Microsoft Uighur"/>
+        <a:font script="Geor" typeface="Sylfaen"/>
+      </a:majorFont>
+      <a:minorFont>
+        <a:latin typeface="Calibri"/>
+        <a:ea typeface=""/>
+        <a:cs typeface=""/>
+        <a:font script="Jpan" typeface="ＭＳ Ｐゴシック"/>
+        <a:font script="Hang" typeface="맑은 고딕"/>
+        <a:font script="Hans" typeface="宋体"/>
+        <a:font script="Hant" typeface="新細明體"/>
+        <a:font script="Arab" typeface="Arial"/>
+        <a:font script="Hebr" typeface="Arial"/>
+        <a:font script="Thai" typeface="Cordia New"/>
+        <a:font script="Ethi" typeface="Nyala"/>
+        <a:font script="Beng" typeface="Vrinda"/>
+        <a:font script="Gujr" typeface="Shruti"/>
+        <a:font script="Khmr" typeface="DaunPenh"/>
+        <a:font script="Knda" typeface="Tunga"/>
+        <a:font script="Guru" typeface="Raavi"/>
+        <a:font script="Cans" typeface="Euphemia"/>
+        <a:font script="Cher" typeface="Plantagenet Cherokee"/>
+        <a:font script="Yiii" typeface="Microsoft Yi Baiti"/>
+        <a:font script="Tibt" typeface="Microsoft Himalaya"/>
+        <a:font script="Thaa" typeface="MV Boli"/>
+        <a:font script="Deva" typeface="Mangal"/>
+        <a:font script="Telu" typeface="Gautami"/>
+        <a:font script="Taml" typeface="Latha"/>
+        <a:font script="Syrc" typeface="Estrangelo Edessa"/>
+        <a:font script="Orya" typeface="Kalinga"/>
+        <a:font script="Mlym" typeface="Kartika"/>
+        <a:font script="Laoo" typeface="DokChampa"/>
+        <a:font script="Sinh" typeface="Iskoola Pota"/>
+        <a:font script="Mong" typeface="Mongolian Baiti"/>
+        <a:font script="Viet" typeface="Arial"/>
+        <a:font script="Uigh" typeface="Microsoft Uighur"/>
+        <a:font script="Geor" typeface="Sylfaen"/>
+      </a:minorFont>
+    </a:fontScheme>
+    <a:fmtScheme name="Office">
+      <a:fillStyleLst>
+        <a:solidFill>
+          <a:schemeClr val="phClr"/>
+        </a:solidFill>
+        <a:gradFill rotWithShape="1">
+          <a:gsLst>
+            <a:gs pos="0">
+              <a:schemeClr val="phClr">
+                <a:tint val="50000"/>
+                <a:satMod val="300000"/>
+              </a:schemeClr>
+            </a:gs>
+            <a:gs pos="35000">
+              <a:schemeClr val="phClr">
+                <a:tint val="37000"/>
+                <a:satMod val="300000"/>
+              </a:schemeClr>
+            </a:gs>
+            <a:gs pos="100000">
+              <a:schemeClr val="phClr">
+                <a:tint val="15000"/>
+                <a:satMod val="350000"/>
+              </a:schemeClr>
+            </a:gs>
+          </a:gsLst>
+          <a:lin ang="16200000" scaled="1"/>
+        </a:gradFill>
+        <a:gradFill rotWithShape="1">
+          <a:gsLst>
+            <a:gs pos="0">
+              <a:schemeClr val="phClr">
+                <a:tint val="100000"/>
+                <a:shade val="100000"/>
+                <a:satMod val="130000"/>
+              </a:schemeClr>
+            </a:gs>
+            <a:gs pos="100000">
+              <a:schemeClr val="phClr">
+                <a:tint val="50000"/>
+                <a:shade val="100000"/>
+                <a:satMod val="350000"/>
+              </a:schemeClr>
+            </a:gs>
+          </a:gsLst>
+          <a:lin ang="16200000" scaled="0"/>
+        </a:gradFill>
+      </a:fillStyleLst>
+      <a:lnStyleLst>
+        <a:ln w="9525" cap="flat" cmpd="sng" algn="ctr">
+          <a:solidFill>
+            <a:schemeClr val="phClr">
+              <a:shade val="95000"/>
+              <a:satMod val="105000"/>
+            </a:schemeClr>
+          </a:solidFill>
+          <a:prstDash val="solid"/>
+        </a:ln>
+        <a:ln w="25400" cap="flat" cmpd="sng" algn="ctr">
+          <a:solidFill>
+            <a:schemeClr val="phClr"/>
+          </a:solidFill>
+          <a:prstDash val="solid"/>
+        </a:ln>
+        <a:ln w="38100" cap="flat" cmpd="sng" algn="ctr">
+          <a:solidFill>
+            <a:schemeClr val="phClr"/>
+          </a:solidFill>
+          <a:prstDash val="solid"/>
+        </a:ln>
+      </a:lnStyleLst>
+      <a:effectStyleLst>
+        <a:effectStyle>
+          <a:effectLst>
+            <a:outerShdw blurRad="40000" dist="20000" dir="5400000" rotWithShape="0">
+              <a:srgbClr val="000000">
+                <a:alpha val="38000"/>
+              </a:srgbClr>
+            </a:outerShdw>
+          </a:effectLst>
+        </a:effectStyle>
+        <a:effectStyle>
+          <a:effectLst>
+            <a:outerShdw blurRad="40000" dist="23000" dir="5400000" rotWithShape="0">
+              <a:srgbClr val="000000">
+                <a:alpha val="35000"/>
+              </a:srgbClr>
+            </a:outerShdw>
+          </a:effectLst>
+        </a:effectStyle>
+        <a:effectStyle>
+          <a:effectLst>
+            <a:outerShdw blurRad="40000" dist="23000" dir="5400000" rotWithShape="0">
+              <a:srgbClr val="000000">
+                <a:alpha val="35000"/>
+              </a:srgbClr>
+            </a:outerShdw>
+          </a:effectLst>
+          <a:scene3d>
+            <a:camera prst="orthographicFront">
+              <a:rot lat="0" lon="0" rev="0"/>
+            </a:camera>
+            <a:lightRig rig="threePt" dir="t">
+              <a:rot lat="0" lon="0" rev="1200000"/>
+            </a:lightRig>
+          </a:scene3d>
+          <a:sp3d>
+            <a:bevelT w="63500" h="25400"/>
+          </a:sp3d>
+        </a:effectStyle>
+      </a:effectStyleLst>
+      <a:bgFillStyleLst>
+        <a:solidFill>
+          <a:schemeClr val="phClr"/>
+        </a:solidFill>
+        <a:gradFill rotWithShape="1">
+          <a:gsLst>
+            <a:gs pos="0">
+              <a:schemeClr val="phClr">
+                <a:tint val="40000"/>
+                <a:satMod val="350000"/>
+              </a:schemeClr>
+            </a:gs>
+            <a:gs pos="40000">
+              <a:schemeClr val="phClr">
+                <a:tint val="45000"/>
+                <a:shade val="99000"/>
+                <a:satMod val="350000"/>
+              </a:schemeClr>
+            </a:gs>
+            <a:gs pos="100000">
+              <a:schemeClr val="phClr">
+                <a:shade val="20000"/>
+                <a:satMod val="255000"/>
+              </a:schemeClr>
+            </a:gs>
+          </a:gsLst>
+          <a:path path="circle">
+            <a:fillToRect l="50000" t="-80000" r="50000" b="180000"/>
+          </a:path>
+        </a:gradFill>
+        <a:gradFill rotWithShape="1">
+          <a:gsLst>
+            <a:gs pos="0">
+              <a:schemeClr val="phClr">
+                <a:tint val="80000"/>
+                <a:satMod val="300000"/>
+              </a:schemeClr>
+            </a:gs>
+            <a:gs pos="100000">
+              <a:schemeClr val="phClr">
+                <a:shade val="30000"/>
+                <a:satMod val="200000"/>
+              </a:schemeClr>
+            </a:gs>
+          </a:gsLst>
+          <a:path path="circle">
+            <a:fillToRect l="50000" t="50000" r="50000" b="50000"/>
+          </a:path>
+        </a:gradFill>
+      </a:bgFillStyleLst>
+    </a:fmtScheme>
+  </a:themeElements>
+  <a:objectDefaults>
+    <a:spDef>
+      <a:spPr/>
+      <a:bodyPr/>
+      <a:lstStyle/>
+      <a:style>
+        <a:lnRef idx="1">
+          <a:schemeClr val="accent1"/>
+        </a:lnRef>
+        <a:fillRef idx="3">
+          <a:schemeClr val="accent1"/>
+        </a:fillRef>
+        <a:effectRef idx="2">
+          <a:schemeClr val="accent1"/>
+        </a:effectRef>
+        <a:fontRef idx="minor">
+          <a:schemeClr val="lt1"/>
+        </a:fontRef>
+      </a:style>
+    </a:spDef>
+    <a:lnDef>
+      <a:spPr/>
+      <a:bodyPr/>
+      <a:lstStyle/>
+      <a:style>
+        <a:lnRef idx="2">
+          <a:schemeClr val="accent1"/>
+        </a:lnRef>
+        <a:fillRef idx="0">
+          <a:schemeClr val="accent1"/>
+        </a:fillRef>
+        <a:effectRef idx="1">
+          <a:schemeClr val="accent1"/>
+        </a:effectRef>
+        <a:fontRef idx="minor">
+          <a:schemeClr val="tx1"/>
+        </a:fontRef>
+      </a:style>
+    </a:lnDef>
+  </a:objectDefaults>
+  <a:extraClrSchemeLst/>
+</a:theme>
 </file>
--- a/arch-docs/summary/ehlnofey-tier-ladders.pptx
+++ b/arch-docs/summary/ehlnofey-tier-ladders.pptx
@@ -5660,7 +5660,7 @@
                 </a:solidFill>
                 <a:latin typeface="Segoe UI"/>
               </a:rPr>
-              <a:t>Bandit</a:t>
+              <a:t>Runt</a:t>
             </a:r>
           </a:p>
         </p:txBody>
@@ -5738,7 +5738,7 @@
                 </a:solidFill>
                 <a:latin typeface="Segoe UI"/>
               </a:rPr>
-              <a:t>×3</a:t>
+              <a:t>×1</a:t>
             </a:r>
           </a:p>
         </p:txBody>
@@ -5943,7 +5943,7 @@
                 </a:solidFill>
                 <a:latin typeface="Segoe UI"/>
               </a:rPr>
-              <a:t>×3</a:t>
+              <a:t>×4</a:t>
             </a:r>
           </a:p>
         </p:txBody>
@@ -6148,7 +6148,7 @@
                 </a:solidFill>
                 <a:latin typeface="Segoe UI"/>
               </a:rPr>
-              <a:t>×2</a:t>
+              <a:t>×3</a:t>
             </a:r>
           </a:p>
         </p:txBody>
@@ -6932,7 +6932,7 @@
                 </a:solidFill>
                 <a:latin typeface="Segoe UI"/>
               </a:rPr>
-              <a:t>Weighted toward Outlaw, reaching Highwayman at worst. Bandits are early-game trouble and they stay early-game trouble.</a:t>
+              <a:t>Mass on Outlaw and Thug. The weakest and strongest rungs are equally rare — 1 in 9 each.</a:t>
             </a:r>
           </a:p>
         </p:txBody>
@@ -18664,7 +18664,7 @@
                           </a:solidFill>
                           <a:latin typeface="Segoe UI"/>
                         </a:rPr>
-                        <a:t>Bandit</a:t>
+                        <a:t>Runt</a:t>
                       </a:r>
                     </a:p>
                   </a:txBody>
@@ -18712,55 +18712,7 @@
                           </a:solidFill>
                           <a:latin typeface="Segoe UI"/>
                         </a:rPr>
-                        <a:t>Bandit</a:t>
-                      </a:r>
-                    </a:p>
-                  </a:txBody>
-                  <a:tcPr marL="128016" marR="91440" marT="41148" marB="41148" anchor="ctr">
-                    <a:solidFill>
-                      <a:srgbClr val="181D27"/>
-                    </a:solidFill>
-                  </a:tcPr>
-                </a:tc>
-              </a:tr>
-              <a:tr h="265176">
-                <a:tc>
-                  <a:txBody>
-                    <a:bodyPr wrap="square"/>
-                    <a:lstStyle/>
-                    <a:p>
-                      <a:pPr algn="l"/>
-                      <a:r>
-                        <a:rPr sz="1100" b="0">
-                          <a:solidFill>
-                            <a:srgbClr val="ECEAE5"/>
-                          </a:solidFill>
-                          <a:latin typeface="Segoe UI"/>
-                        </a:rPr>
-                        <a:t>1</a:t>
-                      </a:r>
-                    </a:p>
-                  </a:txBody>
-                  <a:tcPr marL="128016" marR="91440" marT="41148" marB="41148" anchor="ctr">
-                    <a:solidFill>
-                      <a:srgbClr val="181D27"/>
-                    </a:solidFill>
-                  </a:tcPr>
-                </a:tc>
-                <a:tc>
-                  <a:txBody>
-                    <a:bodyPr wrap="square"/>
-                    <a:lstStyle/>
-                    <a:p>
-                      <a:pPr algn="l"/>
-                      <a:r>
-                        <a:rPr sz="1100" b="0">
-                          <a:solidFill>
-                            <a:srgbClr val="96A0AF"/>
-                          </a:solidFill>
-                          <a:latin typeface="Segoe UI"/>
-                        </a:rPr>
-                        <a:t>Bandit</a:t>
+                        <a:t>Outlaw</a:t>
                       </a:r>
                     </a:p>
                   </a:txBody>
@@ -19048,6 +19000,54 @@
                           </a:solidFill>
                           <a:latin typeface="Segoe UI"/>
                         </a:rPr>
+                        <a:t>Thug</a:t>
+                      </a:r>
+                    </a:p>
+                  </a:txBody>
+                  <a:tcPr marL="128016" marR="91440" marT="41148" marB="41148" anchor="ctr">
+                    <a:solidFill>
+                      <a:srgbClr val="181D27"/>
+                    </a:solidFill>
+                  </a:tcPr>
+                </a:tc>
+              </a:tr>
+              <a:tr h="265176">
+                <a:tc>
+                  <a:txBody>
+                    <a:bodyPr wrap="square"/>
+                    <a:lstStyle/>
+                    <a:p>
+                      <a:pPr algn="l"/>
+                      <a:r>
+                        <a:rPr sz="1100" b="0">
+                          <a:solidFill>
+                            <a:srgbClr val="ECEAE5"/>
+                          </a:solidFill>
+                          <a:latin typeface="Segoe UI"/>
+                        </a:rPr>
+                        <a:t>1</a:t>
+                      </a:r>
+                    </a:p>
+                  </a:txBody>
+                  <a:tcPr marL="128016" marR="91440" marT="41148" marB="41148" anchor="ctr">
+                    <a:solidFill>
+                      <a:srgbClr val="181D27"/>
+                    </a:solidFill>
+                  </a:tcPr>
+                </a:tc>
+                <a:tc>
+                  <a:txBody>
+                    <a:bodyPr wrap="square"/>
+                    <a:lstStyle/>
+                    <a:p>
+                      <a:pPr algn="l"/>
+                      <a:r>
+                        <a:rPr sz="1100" b="0">
+                          <a:solidFill>
+                            <a:srgbClr val="96A0AF"/>
+                          </a:solidFill>
+                          <a:latin typeface="Segoe UI"/>
+                        </a:rPr>
                         <a:t>Highwayman</a:t>
                       </a:r>
                     </a:p>
@@ -19396,7 +19396,7 @@
                 </a:solidFill>
                 <a:latin typeface="Segoe UI"/>
               </a:rPr>
-              <a:t>The engine has no weight field. Listing Bandit three times is how you make it three times as likely.</a:t>
+              <a:t>The engine has no weight field. Listing Outlaw four times is how you make it four times as likely.</a:t>
             </a:r>
           </a:p>
         </p:txBody>
